--- a/assets/memos/B8-memo.pptx
+++ b/assets/memos/B8-memo.pptx
@@ -3105,8 +3105,8 @@
         </p:nvSpPr>
         <p:spPr>
           <a:xfrm>
-            <a:off x="648000" y="1180800"/>
-            <a:ext cx="5058000" cy="511200"/>
+            <a:off x="532800" y="1180800"/>
+            <a:ext cx="6490800" cy="511200"/>
           </a:xfrm>
           <a:prstGeom prst="rect">
             <a:avLst/>
@@ -3128,7 +3128,7 @@
               </a:spcAft>
             </a:pPr>
             <a:r>
-              <a:rPr sz="2000" b="1" i="0">
+              <a:rPr sz="1800" b="1" i="0">
                 <a:solidFill>
                   <a:srgbClr val="4388BC"/>
                 </a:solidFill>
@@ -4562,8 +4562,8 @@
         </p:nvSpPr>
         <p:spPr>
           <a:xfrm>
-            <a:off x="648000" y="1180800"/>
-            <a:ext cx="5058000" cy="511200"/>
+            <a:off x="532800" y="1180800"/>
+            <a:ext cx="6490800" cy="511200"/>
           </a:xfrm>
           <a:prstGeom prst="rect">
             <a:avLst/>
@@ -4585,7 +4585,7 @@
               </a:spcAft>
             </a:pPr>
             <a:r>
-              <a:rPr sz="2000" b="1" i="0">
+              <a:rPr sz="1800" b="1" i="0">
                 <a:solidFill>
                   <a:srgbClr val="4388BC"/>
                 </a:solidFill>

--- a/assets/memos/B8-memo.pptx
+++ b/assets/memos/B8-memo.pptx
@@ -3402,7 +3402,7 @@
                 </a:solidFill>
                 <a:latin typeface="Arial"/>
               </a:rPr>
-              <a:t>→ Beaucoup d'entre nous finissent le mois en se demandant où est pa…</a:t>
+              <a:t>→ Beaucoup d'entre nous finissent le mois en se demandant où est passé l'argent. Sans suivi, les petites dépenses s'accumulent silencieusement. Un budget bien tenu, c'est la liberté de faire des choix éclairés.</a:t>
             </a:r>
           </a:p>
           <a:p>
@@ -3440,7 +3440,7 @@
                 </a:solidFill>
                 <a:latin typeface="Arial"/>
               </a:rPr>
-              <a:t>→ Savoir exactement ce que l'on gagne, ce que l'on dépense, et ce q…</a:t>
+              <a:t>→ Savoir exactement ce que l'on gagne, ce que l'on dépense, et ce qui reste. Fini les mauvaises surprises à la fin du mois.</a:t>
             </a:r>
           </a:p>
           <a:p>
@@ -3708,7 +3708,7 @@
                 </a:solidFill>
                 <a:latin typeface="Arial"/>
               </a:rPr>
-              <a:t>→ Il existe aujourd'hui des dizaines d'applications pour gérer ses …</a:t>
+              <a:t>→ Il existe aujourd'hui des dizaines d'applications pour gérer ses finances. Voici les plus populaires en France, pour tous les profils :</a:t>
             </a:r>
           </a:p>
           <a:p>
@@ -3727,7 +3727,7 @@
                 </a:solidFill>
                 <a:latin typeface="Arial"/>
               </a:rPr>
-              <a:t>→ L'application française de référence. Elle se connecte à vos comp…</a:t>
+              <a:t>→ L'application française de référence. Elle se connecte à vos comptes bancaires et catégorise automatiquement vos dépenses. Idéale pour avoir une vue d'ensemble instantanée.</a:t>
             </a:r>
           </a:p>
           <a:p>
@@ -3746,7 +3746,7 @@
                 </a:solidFill>
                 <a:latin typeface="Arial"/>
               </a:rPr>
-              <a:t>→ Très populaire et intuitive, Bankin' agrège tous vos comptes en u…</a:t>
+              <a:t>→ Très populaire et intuitive, Bankin' agrège tous vos comptes en un seul endroit. Son coach financier virtuel vous alerte sur vos habitudes de dépenses.</a:t>
             </a:r>
           </a:p>
           <a:p>
@@ -3765,7 +3765,7 @@
                 </a:solidFill>
                 <a:latin typeface="Arial"/>
               </a:rPr>
-              <a:t>→ Solution complète avec tableaux de bord personnalisables. Parfait…</a:t>
+              <a:t>→ Solution complète avec tableaux de bord personnalisables. Parfaite pour ceux qui aiment analyser leurs finances en détail et définir des budgets par catégorie.</a:t>
             </a:r>
           </a:p>
         </p:txBody>
@@ -4014,7 +4014,7 @@
                 </a:solidFill>
                 <a:latin typeface="Arial"/>
               </a:rPr>
-              <a:t>→ Pas besoin de dépenser de l'argent pour gérer son argent ! La plu…</a:t>
+              <a:t>→ Pas besoin de dépenser de l'argent pour gérer son argent ! La plupart des outils proposent une version gratuite très complète. Voici comment choisir :</a:t>
             </a:r>
           </a:p>
           <a:p>
@@ -4320,7 +4320,7 @@
                 </a:solidFill>
                 <a:latin typeface="Arial"/>
               </a:rPr>
-              <a:t>→ Au-delà des applications, quelques méthodes éprouvées permettent …</a:t>
+              <a:t>→ Au-delà des applications, quelques méthodes éprouvées permettent de transformer ses habitudes financières en profondeur :</a:t>
             </a:r>
           </a:p>
           <a:p>
@@ -4358,7 +4358,7 @@
                 </a:solidFill>
                 <a:latin typeface="Arial"/>
               </a:rPr>
-              <a:t>→ 50 % pour les besoins essentiels (loyer, courses, factures), 30 %…</a:t>
+              <a:t>→ 50 % pour les besoins essentiels (loyer, courses, factures), 30 % pour les plaisirs, 20 % pour l'épargne. Une répartition simple et efficace.</a:t>
             </a:r>
           </a:p>
           <a:p>
@@ -4462,7 +4462,7 @@
                 </a:solidFill>
                 <a:latin typeface="Arial"/>
               </a:rPr>
-              <a:t>→ Suite en page 2 : Bons plans &amp; outils pour dépenser moins | Sécurité &amp; confidentialité : ce qu'il faut sa… | Vous êtes prête à vous lancer !</a:t>
+              <a:t>→ Suite en page 2 : Bons plans &amp; outils pour dépenser moins | Sécurité &amp; confidentialité : ce qu'il faut savoir | Vous êtes prête à vous lancer !</a:t>
             </a:r>
           </a:p>
           <a:p>
@@ -4859,7 +4859,7 @@
                 </a:solidFill>
                 <a:latin typeface="Arial"/>
               </a:rPr>
-              <a:t>→ La gestion de budget ne se limite pas au suivi des dépenses. Il e…</a:t>
+              <a:t>→ La gestion de budget ne se limite pas au suivi des dépenses. Il existe aussi d'excellents outils numériques pour payer moins cher au quotidien :</a:t>
             </a:r>
           </a:p>
           <a:p>
@@ -4897,7 +4897,7 @@
                 </a:solidFill>
                 <a:latin typeface="Arial"/>
               </a:rPr>
-              <a:t>→ Lydia, Joko, iGraal — Ces apps vous remboursent un pourcentage de…</a:t>
+              <a:t>→ Lydia, Joko, iGraal — Ces apps vous remboursent un pourcentage de vos achats chez des commerçants partenaires. Jusqu'à 10 % remboursé sur certaines enseignes !</a:t>
             </a:r>
           </a:p>
           <a:p>
@@ -5123,7 +5123,7 @@
                 </a:solidFill>
                 <a:latin typeface="Arial"/>
               </a:rPr>
-              <a:t>Sécurité &amp; confidentialité : ce qu'il faut sa…</a:t>
+              <a:t>Sécurité &amp; confidentialité : ce qu'il faut savoir</a:t>
             </a:r>
           </a:p>
         </p:txBody>
@@ -5165,7 +5165,7 @@
                 </a:solidFill>
                 <a:latin typeface="Arial"/>
               </a:rPr>
-              <a:t>→ La principale réticence à utiliser ces outils est souvent la ques…</a:t>
+              <a:t>→ La principale réticence à utiliser ces outils est souvent la question de la sécurité. Voici les éléments essentiels pour faire des choix éclairés et serein :</a:t>
             </a:r>
           </a:p>
           <a:p>
@@ -5471,7 +5471,7 @@
                 </a:solidFill>
                 <a:latin typeface="Arial"/>
               </a:rPr>
-              <a:t>→ La gestion de budget numérique n'est pas réservée aux experts en …</a:t>
+              <a:t>→ La gestion de budget numérique n'est pas réservée aux experts en finance. Avec les bons outils, quelques minutes par semaine suffisent pour transformer votre relation à l'argent.</a:t>
             </a:r>
           </a:p>
           <a:p>
@@ -5509,7 +5509,7 @@
                 </a:solidFill>
                 <a:latin typeface="Arial"/>
               </a:rPr>
-              <a:t>→ Téléchargez Linxo ou Bankin' (gratuit) et connectez votre compte …</a:t>
+              <a:t>→ Téléchargez Linxo ou Bankin' (gratuit) et connectez votre compte principal. Observez simplement vos catégories de dépenses.</a:t>
             </a:r>
           </a:p>
           <a:p>

--- a/assets/memos/B8-memo.pptx
+++ b/assets/memos/B8-memo.pptx
@@ -3167,7 +3167,7 @@
         <p:spPr>
           <a:xfrm>
             <a:off x="532800" y="1749600"/>
-            <a:ext cx="6490800" cy="1371600"/>
+            <a:ext cx="6490800" cy="1684800"/>
           </a:xfrm>
           <a:prstGeom prst="rect">
             <a:avLst/>
@@ -3208,7 +3208,7 @@
         <p:spPr>
           <a:xfrm>
             <a:off x="532800" y="1749600"/>
-            <a:ext cx="572400" cy="1371600"/>
+            <a:ext cx="572400" cy="1684800"/>
           </a:xfrm>
           <a:prstGeom prst="rect">
             <a:avLst/>
@@ -3374,7 +3374,7 @@
         <p:spPr>
           <a:xfrm>
             <a:off x="1159200" y="2214000"/>
-            <a:ext cx="5828400" cy="885600"/>
+            <a:ext cx="5828400" cy="1184399"/>
           </a:xfrm>
           <a:prstGeom prst="rect">
             <a:avLst/>
@@ -3472,8 +3472,8 @@
         </p:nvSpPr>
         <p:spPr>
           <a:xfrm>
-            <a:off x="532800" y="3186000"/>
-            <a:ext cx="6490800" cy="1371600"/>
+            <a:off x="532800" y="3499199"/>
+            <a:ext cx="6490800" cy="2138400"/>
           </a:xfrm>
           <a:prstGeom prst="rect">
             <a:avLst/>
@@ -3513,8 +3513,8 @@
         </p:nvSpPr>
         <p:spPr>
           <a:xfrm>
-            <a:off x="532800" y="3186000"/>
-            <a:ext cx="572400" cy="1371600"/>
+            <a:off x="532800" y="3499199"/>
+            <a:ext cx="572400" cy="2138400"/>
           </a:xfrm>
           <a:prstGeom prst="rect">
             <a:avLst/>
@@ -3554,7 +3554,7 @@
         </p:nvSpPr>
         <p:spPr>
           <a:xfrm>
-            <a:off x="1206000" y="3607200"/>
+            <a:off x="1206000" y="3920399"/>
             <a:ext cx="5752800" cy="7200"/>
           </a:xfrm>
           <a:prstGeom prst="rect">
@@ -3595,7 +3595,7 @@
         </p:nvSpPr>
         <p:spPr>
           <a:xfrm>
-            <a:off x="532800" y="3252600"/>
+            <a:off x="532800" y="3565800"/>
             <a:ext cx="572400" cy="288000"/>
           </a:xfrm>
           <a:prstGeom prst="rect">
@@ -3637,7 +3637,7 @@
         </p:nvSpPr>
         <p:spPr>
           <a:xfrm>
-            <a:off x="1177200" y="3221999"/>
+            <a:off x="1177200" y="3535199"/>
             <a:ext cx="5810400" cy="370799"/>
           </a:xfrm>
           <a:prstGeom prst="rect">
@@ -3679,8 +3679,8 @@
         </p:nvSpPr>
         <p:spPr>
           <a:xfrm>
-            <a:off x="1159200" y="3650399"/>
-            <a:ext cx="5828400" cy="885600"/>
+            <a:off x="1159200" y="3963599"/>
+            <a:ext cx="5828400" cy="1638000"/>
           </a:xfrm>
           <a:prstGeom prst="rect">
             <a:avLst/>
@@ -3778,8 +3778,8 @@
         </p:nvSpPr>
         <p:spPr>
           <a:xfrm>
-            <a:off x="532800" y="4622400"/>
-            <a:ext cx="6490800" cy="1371600"/>
+            <a:off x="532800" y="5702399"/>
+            <a:ext cx="6490800" cy="1382400"/>
           </a:xfrm>
           <a:prstGeom prst="rect">
             <a:avLst/>
@@ -3819,8 +3819,8 @@
         </p:nvSpPr>
         <p:spPr>
           <a:xfrm>
-            <a:off x="532800" y="4622400"/>
-            <a:ext cx="572400" cy="1371600"/>
+            <a:off x="532800" y="5702399"/>
+            <a:ext cx="572400" cy="1382400"/>
           </a:xfrm>
           <a:prstGeom prst="rect">
             <a:avLst/>
@@ -3860,7 +3860,7 @@
         </p:nvSpPr>
         <p:spPr>
           <a:xfrm>
-            <a:off x="1206000" y="5043600"/>
+            <a:off x="1206000" y="6123599"/>
             <a:ext cx="5752800" cy="7200"/>
           </a:xfrm>
           <a:prstGeom prst="rect">
@@ -3901,7 +3901,7 @@
         </p:nvSpPr>
         <p:spPr>
           <a:xfrm>
-            <a:off x="532800" y="4689000"/>
+            <a:off x="532800" y="5768999"/>
             <a:ext cx="572400" cy="288000"/>
           </a:xfrm>
           <a:prstGeom prst="rect">
@@ -3943,7 +3943,7 @@
         </p:nvSpPr>
         <p:spPr>
           <a:xfrm>
-            <a:off x="1177200" y="4658400"/>
+            <a:off x="1177200" y="5738399"/>
             <a:ext cx="5810400" cy="370799"/>
           </a:xfrm>
           <a:prstGeom prst="rect">
@@ -3985,8 +3985,8 @@
         </p:nvSpPr>
         <p:spPr>
           <a:xfrm>
-            <a:off x="1159200" y="5086800"/>
-            <a:ext cx="5828400" cy="885600"/>
+            <a:off x="1159200" y="6166800"/>
+            <a:ext cx="5828400" cy="881999"/>
           </a:xfrm>
           <a:prstGeom prst="rect">
             <a:avLst/>
@@ -4079,312 +4079,6 @@
       <p:sp>
         <p:nvSpPr>
           <p:cNvPr id="21" name="Rectangle 20"/>
-          <p:cNvSpPr/>
-          <p:nvPr/>
-        </p:nvSpPr>
-        <p:spPr>
-          <a:xfrm>
-            <a:off x="532800" y="6058799"/>
-            <a:ext cx="6490800" cy="1371600"/>
-          </a:xfrm>
-          <a:prstGeom prst="rect">
-            <a:avLst/>
-          </a:prstGeom>
-          <a:solidFill>
-            <a:srgbClr val="EBF7F6"/>
-          </a:solidFill>
-          <a:ln>
-            <a:noFill/>
-          </a:ln>
-        </p:spPr>
-        <p:style>
-          <a:lnRef idx="1">
-            <a:schemeClr val="accent1"/>
-          </a:lnRef>
-          <a:fillRef idx="3">
-            <a:schemeClr val="accent1"/>
-          </a:fillRef>
-          <a:effectRef idx="2">
-            <a:schemeClr val="accent1"/>
-          </a:effectRef>
-          <a:fontRef idx="minor">
-            <a:schemeClr val="lt1"/>
-          </a:fontRef>
-        </p:style>
-        <p:txBody>
-          <a:bodyPr rtlCol="0" anchor="ctr"/>
-          <a:lstStyle/>
-          <a:p/>
-        </p:txBody>
-      </p:sp>
-      <p:sp>
-        <p:nvSpPr>
-          <p:cNvPr id="22" name="Rectangle 21"/>
-          <p:cNvSpPr/>
-          <p:nvPr/>
-        </p:nvSpPr>
-        <p:spPr>
-          <a:xfrm>
-            <a:off x="532800" y="6058799"/>
-            <a:ext cx="572400" cy="1371600"/>
-          </a:xfrm>
-          <a:prstGeom prst="rect">
-            <a:avLst/>
-          </a:prstGeom>
-          <a:solidFill>
-            <a:srgbClr val="187C88"/>
-          </a:solidFill>
-          <a:ln>
-            <a:noFill/>
-          </a:ln>
-        </p:spPr>
-        <p:style>
-          <a:lnRef idx="1">
-            <a:schemeClr val="accent1"/>
-          </a:lnRef>
-          <a:fillRef idx="3">
-            <a:schemeClr val="accent1"/>
-          </a:fillRef>
-          <a:effectRef idx="2">
-            <a:schemeClr val="accent1"/>
-          </a:effectRef>
-          <a:fontRef idx="minor">
-            <a:schemeClr val="lt1"/>
-          </a:fontRef>
-        </p:style>
-        <p:txBody>
-          <a:bodyPr rtlCol="0" anchor="ctr"/>
-          <a:lstStyle/>
-          <a:p/>
-        </p:txBody>
-      </p:sp>
-      <p:sp>
-        <p:nvSpPr>
-          <p:cNvPr id="23" name="Rectangle 22"/>
-          <p:cNvSpPr/>
-          <p:nvPr/>
-        </p:nvSpPr>
-        <p:spPr>
-          <a:xfrm>
-            <a:off x="1206000" y="6480000"/>
-            <a:ext cx="5752800" cy="7200"/>
-          </a:xfrm>
-          <a:prstGeom prst="rect">
-            <a:avLst/>
-          </a:prstGeom>
-          <a:solidFill>
-            <a:srgbClr val="DDDDDD"/>
-          </a:solidFill>
-          <a:ln>
-            <a:noFill/>
-          </a:ln>
-        </p:spPr>
-        <p:style>
-          <a:lnRef idx="1">
-            <a:schemeClr val="accent1"/>
-          </a:lnRef>
-          <a:fillRef idx="3">
-            <a:schemeClr val="accent1"/>
-          </a:fillRef>
-          <a:effectRef idx="2">
-            <a:schemeClr val="accent1"/>
-          </a:effectRef>
-          <a:fontRef idx="minor">
-            <a:schemeClr val="lt1"/>
-          </a:fontRef>
-        </p:style>
-        <p:txBody>
-          <a:bodyPr rtlCol="0" anchor="ctr"/>
-          <a:lstStyle/>
-          <a:p/>
-        </p:txBody>
-      </p:sp>
-      <p:sp>
-        <p:nvSpPr>
-          <p:cNvPr id="24" name="TextBox 23"/>
-          <p:cNvSpPr txBox="1"/>
-          <p:nvPr/>
-        </p:nvSpPr>
-        <p:spPr>
-          <a:xfrm>
-            <a:off x="532800" y="6125399"/>
-            <a:ext cx="572400" cy="288000"/>
-          </a:xfrm>
-          <a:prstGeom prst="rect">
-            <a:avLst/>
-          </a:prstGeom>
-          <a:noFill/>
-        </p:spPr>
-        <p:txBody>
-          <a:bodyPr wrap="square" tIns="0" bIns="0" lIns="18000" rIns="18000">
-            <a:spAutoFit/>
-          </a:bodyPr>
-          <a:lstStyle/>
-          <a:p>
-            <a:pPr algn="ctr">
-              <a:spcBef>
-                <a:spcPts val="0"/>
-              </a:spcBef>
-              <a:spcAft>
-                <a:spcPts val="100"/>
-              </a:spcAft>
-            </a:pPr>
-            <a:r>
-              <a:rPr sz="2200" b="1" i="0">
-                <a:solidFill>
-                  <a:srgbClr val="FFFFFF"/>
-                </a:solidFill>
-                <a:latin typeface="Arial"/>
-              </a:rPr>
-              <a:t>4</a:t>
-            </a:r>
-          </a:p>
-        </p:txBody>
-      </p:sp>
-      <p:sp>
-        <p:nvSpPr>
-          <p:cNvPr id="25" name="TextBox 24"/>
-          <p:cNvSpPr txBox="1"/>
-          <p:nvPr/>
-        </p:nvSpPr>
-        <p:spPr>
-          <a:xfrm>
-            <a:off x="1177200" y="6094800"/>
-            <a:ext cx="5810400" cy="370799"/>
-          </a:xfrm>
-          <a:prstGeom prst="rect">
-            <a:avLst/>
-          </a:prstGeom>
-          <a:noFill/>
-        </p:spPr>
-        <p:txBody>
-          <a:bodyPr wrap="square" tIns="0" bIns="0" lIns="18000" rIns="18000">
-            <a:spAutoFit/>
-          </a:bodyPr>
-          <a:lstStyle/>
-          <a:p>
-            <a:pPr algn="l">
-              <a:spcBef>
-                <a:spcPts val="0"/>
-              </a:spcBef>
-              <a:spcAft>
-                <a:spcPts val="100"/>
-              </a:spcAft>
-            </a:pPr>
-            <a:r>
-              <a:rPr sz="1100" b="1" i="0">
-                <a:solidFill>
-                  <a:srgbClr val="187C88"/>
-                </a:solidFill>
-                <a:latin typeface="Arial"/>
-              </a:rPr>
-              <a:t>Astuces pour optimiser son budget</a:t>
-            </a:r>
-          </a:p>
-        </p:txBody>
-      </p:sp>
-      <p:sp>
-        <p:nvSpPr>
-          <p:cNvPr id="26" name="TextBox 25"/>
-          <p:cNvSpPr txBox="1"/>
-          <p:nvPr/>
-        </p:nvSpPr>
-        <p:spPr>
-          <a:xfrm>
-            <a:off x="1159200" y="6523200"/>
-            <a:ext cx="5828400" cy="885600"/>
-          </a:xfrm>
-          <a:prstGeom prst="rect">
-            <a:avLst/>
-          </a:prstGeom>
-          <a:noFill/>
-        </p:spPr>
-        <p:txBody>
-          <a:bodyPr wrap="square" tIns="0" bIns="0" lIns="18000" rIns="18000">
-            <a:spAutoFit/>
-          </a:bodyPr>
-          <a:lstStyle/>
-          <a:p>
-            <a:pPr algn="l">
-              <a:spcBef>
-                <a:spcPts val="0"/>
-              </a:spcBef>
-              <a:spcAft>
-                <a:spcPts val="100"/>
-              </a:spcAft>
-            </a:pPr>
-            <a:r>
-              <a:rPr sz="1000" b="0" i="0">
-                <a:solidFill>
-                  <a:srgbClr val="2B2B2B"/>
-                </a:solidFill>
-                <a:latin typeface="Arial"/>
-              </a:rPr>
-              <a:t>→ Au-delà des applications, quelques méthodes éprouvées permettent de transformer ses habitudes financières en profondeur :</a:t>
-            </a:r>
-          </a:p>
-          <a:p>
-            <a:pPr algn="l">
-              <a:spcBef>
-                <a:spcPts val="0"/>
-              </a:spcBef>
-              <a:spcAft>
-                <a:spcPts val="100"/>
-              </a:spcAft>
-            </a:pPr>
-            <a:r>
-              <a:rPr sz="1000" b="0" i="0">
-                <a:solidFill>
-                  <a:srgbClr val="2B2B2B"/>
-                </a:solidFill>
-                <a:latin typeface="Arial"/>
-              </a:rPr>
-              <a:t>→ La règle 50/30/20</a:t>
-            </a:r>
-          </a:p>
-          <a:p>
-            <a:pPr algn="l">
-              <a:spcBef>
-                <a:spcPts val="0"/>
-              </a:spcBef>
-              <a:spcAft>
-                <a:spcPts val="100"/>
-              </a:spcAft>
-            </a:pPr>
-            <a:r>
-              <a:rPr sz="1000" b="0" i="0">
-                <a:solidFill>
-                  <a:srgbClr val="2B2B2B"/>
-                </a:solidFill>
-                <a:latin typeface="Arial"/>
-              </a:rPr>
-              <a:t>→ 50 % pour les besoins essentiels (loyer, courses, factures), 30 % pour les plaisirs, 20 % pour l'épargne. Une répartition simple et efficace.</a:t>
-            </a:r>
-          </a:p>
-          <a:p>
-            <a:pPr algn="l">
-              <a:spcBef>
-                <a:spcPts val="0"/>
-              </a:spcBef>
-              <a:spcAft>
-                <a:spcPts val="100"/>
-              </a:spcAft>
-            </a:pPr>
-            <a:r>
-              <a:rPr sz="1000" b="0" i="0">
-                <a:solidFill>
-                  <a:srgbClr val="2B2B2B"/>
-                </a:solidFill>
-                <a:latin typeface="Arial"/>
-              </a:rPr>
-              <a:t>→ La méthode des enveloppes</a:t>
-            </a:r>
-          </a:p>
-        </p:txBody>
-      </p:sp>
-      <p:sp>
-        <p:nvSpPr>
-          <p:cNvPr id="27" name="Rectangle 26"/>
           <p:cNvSpPr/>
           <p:nvPr/>
         </p:nvSpPr>
@@ -4427,7 +4121,7 @@
       </p:sp>
       <p:sp>
         <p:nvSpPr>
-          <p:cNvPr id="28" name="TextBox 27"/>
+          <p:cNvPr id="22" name="TextBox 21"/>
           <p:cNvSpPr txBox="1"/>
           <p:nvPr/>
         </p:nvSpPr>
@@ -4462,7 +4156,7 @@
                 </a:solidFill>
                 <a:latin typeface="Arial"/>
               </a:rPr>
-              <a:t>→ Suite en page 2 : Bons plans &amp; outils pour dépenser moins | Sécurité &amp; confidentialité : ce qu'il faut savoir | Vous êtes prête à vous lancer !</a:t>
+              <a:t>→ Suite en page 2 : Astuces pour optimiser son budget | Bons plans &amp; outils pour dépenser moins | Sécurité &amp; confidentialité : ce qu'il faut savoir</a:t>
             </a:r>
           </a:p>
           <a:p>
@@ -4488,7 +4182,7 @@
       </p:sp>
       <p:sp>
         <p:nvSpPr>
-          <p:cNvPr id="29" name="TextBox 28"/>
+          <p:cNvPr id="23" name="TextBox 22"/>
           <p:cNvSpPr txBox="1"/>
           <p:nvPr/>
         </p:nvSpPr>
@@ -4624,7 +4318,313 @@
         <p:spPr>
           <a:xfrm>
             <a:off x="532800" y="1749600"/>
-            <a:ext cx="6490800" cy="1371600"/>
+            <a:ext cx="6490800" cy="1533600"/>
+          </a:xfrm>
+          <a:prstGeom prst="rect">
+            <a:avLst/>
+          </a:prstGeom>
+          <a:solidFill>
+            <a:srgbClr val="EBF7F6"/>
+          </a:solidFill>
+          <a:ln>
+            <a:noFill/>
+          </a:ln>
+        </p:spPr>
+        <p:style>
+          <a:lnRef idx="1">
+            <a:schemeClr val="accent1"/>
+          </a:lnRef>
+          <a:fillRef idx="3">
+            <a:schemeClr val="accent1"/>
+          </a:fillRef>
+          <a:effectRef idx="2">
+            <a:schemeClr val="accent1"/>
+          </a:effectRef>
+          <a:fontRef idx="minor">
+            <a:schemeClr val="lt1"/>
+          </a:fontRef>
+        </p:style>
+        <p:txBody>
+          <a:bodyPr rtlCol="0" anchor="ctr"/>
+          <a:lstStyle/>
+          <a:p/>
+        </p:txBody>
+      </p:sp>
+      <p:sp>
+        <p:nvSpPr>
+          <p:cNvPr id="4" name="Rectangle 3"/>
+          <p:cNvSpPr/>
+          <p:nvPr/>
+        </p:nvSpPr>
+        <p:spPr>
+          <a:xfrm>
+            <a:off x="532800" y="1749600"/>
+            <a:ext cx="572400" cy="1533600"/>
+          </a:xfrm>
+          <a:prstGeom prst="rect">
+            <a:avLst/>
+          </a:prstGeom>
+          <a:solidFill>
+            <a:srgbClr val="187C88"/>
+          </a:solidFill>
+          <a:ln>
+            <a:noFill/>
+          </a:ln>
+        </p:spPr>
+        <p:style>
+          <a:lnRef idx="1">
+            <a:schemeClr val="accent1"/>
+          </a:lnRef>
+          <a:fillRef idx="3">
+            <a:schemeClr val="accent1"/>
+          </a:fillRef>
+          <a:effectRef idx="2">
+            <a:schemeClr val="accent1"/>
+          </a:effectRef>
+          <a:fontRef idx="minor">
+            <a:schemeClr val="lt1"/>
+          </a:fontRef>
+        </p:style>
+        <p:txBody>
+          <a:bodyPr rtlCol="0" anchor="ctr"/>
+          <a:lstStyle/>
+          <a:p/>
+        </p:txBody>
+      </p:sp>
+      <p:sp>
+        <p:nvSpPr>
+          <p:cNvPr id="5" name="Rectangle 4"/>
+          <p:cNvSpPr/>
+          <p:nvPr/>
+        </p:nvSpPr>
+        <p:spPr>
+          <a:xfrm>
+            <a:off x="1206000" y="2170800"/>
+            <a:ext cx="5752800" cy="7200"/>
+          </a:xfrm>
+          <a:prstGeom prst="rect">
+            <a:avLst/>
+          </a:prstGeom>
+          <a:solidFill>
+            <a:srgbClr val="DDDDDD"/>
+          </a:solidFill>
+          <a:ln>
+            <a:noFill/>
+          </a:ln>
+        </p:spPr>
+        <p:style>
+          <a:lnRef idx="1">
+            <a:schemeClr val="accent1"/>
+          </a:lnRef>
+          <a:fillRef idx="3">
+            <a:schemeClr val="accent1"/>
+          </a:fillRef>
+          <a:effectRef idx="2">
+            <a:schemeClr val="accent1"/>
+          </a:effectRef>
+          <a:fontRef idx="minor">
+            <a:schemeClr val="lt1"/>
+          </a:fontRef>
+        </p:style>
+        <p:txBody>
+          <a:bodyPr rtlCol="0" anchor="ctr"/>
+          <a:lstStyle/>
+          <a:p/>
+        </p:txBody>
+      </p:sp>
+      <p:sp>
+        <p:nvSpPr>
+          <p:cNvPr id="6" name="TextBox 5"/>
+          <p:cNvSpPr txBox="1"/>
+          <p:nvPr/>
+        </p:nvSpPr>
+        <p:spPr>
+          <a:xfrm>
+            <a:off x="532800" y="1816200"/>
+            <a:ext cx="572400" cy="288000"/>
+          </a:xfrm>
+          <a:prstGeom prst="rect">
+            <a:avLst/>
+          </a:prstGeom>
+          <a:noFill/>
+        </p:spPr>
+        <p:txBody>
+          <a:bodyPr wrap="square" tIns="0" bIns="0" lIns="18000" rIns="18000">
+            <a:spAutoFit/>
+          </a:bodyPr>
+          <a:lstStyle/>
+          <a:p>
+            <a:pPr algn="ctr">
+              <a:spcBef>
+                <a:spcPts val="0"/>
+              </a:spcBef>
+              <a:spcAft>
+                <a:spcPts val="100"/>
+              </a:spcAft>
+            </a:pPr>
+            <a:r>
+              <a:rPr sz="2200" b="1" i="0">
+                <a:solidFill>
+                  <a:srgbClr val="FFFFFF"/>
+                </a:solidFill>
+                <a:latin typeface="Arial"/>
+              </a:rPr>
+              <a:t>4</a:t>
+            </a:r>
+          </a:p>
+        </p:txBody>
+      </p:sp>
+      <p:sp>
+        <p:nvSpPr>
+          <p:cNvPr id="7" name="TextBox 6"/>
+          <p:cNvSpPr txBox="1"/>
+          <p:nvPr/>
+        </p:nvSpPr>
+        <p:spPr>
+          <a:xfrm>
+            <a:off x="1177200" y="1785600"/>
+            <a:ext cx="5810400" cy="370799"/>
+          </a:xfrm>
+          <a:prstGeom prst="rect">
+            <a:avLst/>
+          </a:prstGeom>
+          <a:noFill/>
+        </p:spPr>
+        <p:txBody>
+          <a:bodyPr wrap="square" tIns="0" bIns="0" lIns="18000" rIns="18000">
+            <a:spAutoFit/>
+          </a:bodyPr>
+          <a:lstStyle/>
+          <a:p>
+            <a:pPr algn="l">
+              <a:spcBef>
+                <a:spcPts val="0"/>
+              </a:spcBef>
+              <a:spcAft>
+                <a:spcPts val="100"/>
+              </a:spcAft>
+            </a:pPr>
+            <a:r>
+              <a:rPr sz="1100" b="1" i="0">
+                <a:solidFill>
+                  <a:srgbClr val="187C88"/>
+                </a:solidFill>
+                <a:latin typeface="Arial"/>
+              </a:rPr>
+              <a:t>Astuces pour optimiser son budget</a:t>
+            </a:r>
+          </a:p>
+        </p:txBody>
+      </p:sp>
+      <p:sp>
+        <p:nvSpPr>
+          <p:cNvPr id="8" name="TextBox 7"/>
+          <p:cNvSpPr txBox="1"/>
+          <p:nvPr/>
+        </p:nvSpPr>
+        <p:spPr>
+          <a:xfrm>
+            <a:off x="1159200" y="2214000"/>
+            <a:ext cx="5828400" cy="1033199"/>
+          </a:xfrm>
+          <a:prstGeom prst="rect">
+            <a:avLst/>
+          </a:prstGeom>
+          <a:noFill/>
+        </p:spPr>
+        <p:txBody>
+          <a:bodyPr wrap="square" tIns="0" bIns="0" lIns="18000" rIns="18000">
+            <a:spAutoFit/>
+          </a:bodyPr>
+          <a:lstStyle/>
+          <a:p>
+            <a:pPr algn="l">
+              <a:spcBef>
+                <a:spcPts val="0"/>
+              </a:spcBef>
+              <a:spcAft>
+                <a:spcPts val="100"/>
+              </a:spcAft>
+            </a:pPr>
+            <a:r>
+              <a:rPr sz="1000" b="0" i="0">
+                <a:solidFill>
+                  <a:srgbClr val="2B2B2B"/>
+                </a:solidFill>
+                <a:latin typeface="Arial"/>
+              </a:rPr>
+              <a:t>→ Au-delà des applications, quelques méthodes éprouvées permettent de transformer ses habitudes financières en profondeur :</a:t>
+            </a:r>
+          </a:p>
+          <a:p>
+            <a:pPr algn="l">
+              <a:spcBef>
+                <a:spcPts val="0"/>
+              </a:spcBef>
+              <a:spcAft>
+                <a:spcPts val="100"/>
+              </a:spcAft>
+            </a:pPr>
+            <a:r>
+              <a:rPr sz="1000" b="0" i="0">
+                <a:solidFill>
+                  <a:srgbClr val="2B2B2B"/>
+                </a:solidFill>
+                <a:latin typeface="Arial"/>
+              </a:rPr>
+              <a:t>→ La règle 50/30/20</a:t>
+            </a:r>
+          </a:p>
+          <a:p>
+            <a:pPr algn="l">
+              <a:spcBef>
+                <a:spcPts val="0"/>
+              </a:spcBef>
+              <a:spcAft>
+                <a:spcPts val="100"/>
+              </a:spcAft>
+            </a:pPr>
+            <a:r>
+              <a:rPr sz="1000" b="0" i="0">
+                <a:solidFill>
+                  <a:srgbClr val="2B2B2B"/>
+                </a:solidFill>
+                <a:latin typeface="Arial"/>
+              </a:rPr>
+              <a:t>→ 50 % pour les besoins essentiels (loyer, courses, factures), 30 % pour les plaisirs, 20 % pour l'épargne. Une répartition simple et efficace.</a:t>
+            </a:r>
+          </a:p>
+          <a:p>
+            <a:pPr algn="l">
+              <a:spcBef>
+                <a:spcPts val="0"/>
+              </a:spcBef>
+              <a:spcAft>
+                <a:spcPts val="100"/>
+              </a:spcAft>
+            </a:pPr>
+            <a:r>
+              <a:rPr sz="1000" b="0" i="0">
+                <a:solidFill>
+                  <a:srgbClr val="2B2B2B"/>
+                </a:solidFill>
+                <a:latin typeface="Arial"/>
+              </a:rPr>
+              <a:t>→ La méthode des enveloppes</a:t>
+            </a:r>
+          </a:p>
+        </p:txBody>
+      </p:sp>
+      <p:sp>
+        <p:nvSpPr>
+          <p:cNvPr id="9" name="Rectangle 8"/>
+          <p:cNvSpPr/>
+          <p:nvPr/>
+        </p:nvSpPr>
+        <p:spPr>
+          <a:xfrm>
+            <a:off x="532800" y="3348000"/>
+            <a:ext cx="6490800" cy="1684800"/>
           </a:xfrm>
           <a:prstGeom prst="rect">
             <a:avLst/>
@@ -4658,14 +4658,14 @@
       </p:sp>
       <p:sp>
         <p:nvSpPr>
-          <p:cNvPr id="4" name="Rectangle 3"/>
+          <p:cNvPr id="10" name="Rectangle 9"/>
           <p:cNvSpPr/>
           <p:nvPr/>
         </p:nvSpPr>
         <p:spPr>
           <a:xfrm>
-            <a:off x="532800" y="1749600"/>
-            <a:ext cx="572400" cy="1371600"/>
+            <a:off x="532800" y="3348000"/>
+            <a:ext cx="572400" cy="1684800"/>
           </a:xfrm>
           <a:prstGeom prst="rect">
             <a:avLst/>
@@ -4699,13 +4699,13 @@
       </p:sp>
       <p:sp>
         <p:nvSpPr>
-          <p:cNvPr id="5" name="Rectangle 4"/>
+          <p:cNvPr id="11" name="Rectangle 10"/>
           <p:cNvSpPr/>
           <p:nvPr/>
         </p:nvSpPr>
         <p:spPr>
           <a:xfrm>
-            <a:off x="1206000" y="2170800"/>
+            <a:off x="1206000" y="3769200"/>
             <a:ext cx="5752800" cy="7200"/>
           </a:xfrm>
           <a:prstGeom prst="rect">
@@ -4740,13 +4740,13 @@
       </p:sp>
       <p:sp>
         <p:nvSpPr>
-          <p:cNvPr id="6" name="TextBox 5"/>
+          <p:cNvPr id="12" name="TextBox 11"/>
           <p:cNvSpPr txBox="1"/>
           <p:nvPr/>
         </p:nvSpPr>
         <p:spPr>
           <a:xfrm>
-            <a:off x="532800" y="1816200"/>
+            <a:off x="532800" y="3414600"/>
             <a:ext cx="572400" cy="288000"/>
           </a:xfrm>
           <a:prstGeom prst="rect">
@@ -4782,13 +4782,13 @@
       </p:sp>
       <p:sp>
         <p:nvSpPr>
-          <p:cNvPr id="7" name="TextBox 6"/>
+          <p:cNvPr id="13" name="TextBox 12"/>
           <p:cNvSpPr txBox="1"/>
           <p:nvPr/>
         </p:nvSpPr>
         <p:spPr>
           <a:xfrm>
-            <a:off x="1177200" y="1785600"/>
+            <a:off x="1177200" y="3384000"/>
             <a:ext cx="5810400" cy="370799"/>
           </a:xfrm>
           <a:prstGeom prst="rect">
@@ -4824,14 +4824,14 @@
       </p:sp>
       <p:sp>
         <p:nvSpPr>
-          <p:cNvPr id="8" name="TextBox 7"/>
+          <p:cNvPr id="14" name="TextBox 13"/>
           <p:cNvSpPr txBox="1"/>
           <p:nvPr/>
         </p:nvSpPr>
         <p:spPr>
           <a:xfrm>
-            <a:off x="1159200" y="2214000"/>
-            <a:ext cx="5828400" cy="885600"/>
+            <a:off x="1159200" y="3812400"/>
+            <a:ext cx="5828400" cy="1184399"/>
           </a:xfrm>
           <a:prstGeom prst="rect">
             <a:avLst/>
@@ -4923,14 +4923,14 @@
       </p:sp>
       <p:sp>
         <p:nvSpPr>
-          <p:cNvPr id="9" name="Rectangle 8"/>
+          <p:cNvPr id="15" name="Rectangle 14"/>
           <p:cNvSpPr/>
           <p:nvPr/>
         </p:nvSpPr>
         <p:spPr>
           <a:xfrm>
-            <a:off x="532800" y="3186000"/>
-            <a:ext cx="6490800" cy="1371600"/>
+            <a:off x="532800" y="5097600"/>
+            <a:ext cx="6490800" cy="1533600"/>
           </a:xfrm>
           <a:prstGeom prst="rect">
             <a:avLst/>
@@ -4964,14 +4964,14 @@
       </p:sp>
       <p:sp>
         <p:nvSpPr>
-          <p:cNvPr id="10" name="Rectangle 9"/>
+          <p:cNvPr id="16" name="Rectangle 15"/>
           <p:cNvSpPr/>
           <p:nvPr/>
         </p:nvSpPr>
         <p:spPr>
           <a:xfrm>
-            <a:off x="532800" y="3186000"/>
-            <a:ext cx="572400" cy="1371600"/>
+            <a:off x="532800" y="5097600"/>
+            <a:ext cx="572400" cy="1533600"/>
           </a:xfrm>
           <a:prstGeom prst="rect">
             <a:avLst/>
@@ -5005,13 +5005,13 @@
       </p:sp>
       <p:sp>
         <p:nvSpPr>
-          <p:cNvPr id="11" name="Rectangle 10"/>
+          <p:cNvPr id="17" name="Rectangle 16"/>
           <p:cNvSpPr/>
           <p:nvPr/>
         </p:nvSpPr>
         <p:spPr>
           <a:xfrm>
-            <a:off x="1206000" y="3607200"/>
+            <a:off x="1206000" y="5518800"/>
             <a:ext cx="5752800" cy="7200"/>
           </a:xfrm>
           <a:prstGeom prst="rect">
@@ -5046,13 +5046,13 @@
       </p:sp>
       <p:sp>
         <p:nvSpPr>
-          <p:cNvPr id="12" name="TextBox 11"/>
+          <p:cNvPr id="18" name="TextBox 17"/>
           <p:cNvSpPr txBox="1"/>
           <p:nvPr/>
         </p:nvSpPr>
         <p:spPr>
           <a:xfrm>
-            <a:off x="532800" y="3252600"/>
+            <a:off x="532800" y="5164200"/>
             <a:ext cx="572400" cy="288000"/>
           </a:xfrm>
           <a:prstGeom prst="rect">
@@ -5088,13 +5088,13 @@
       </p:sp>
       <p:sp>
         <p:nvSpPr>
-          <p:cNvPr id="13" name="TextBox 12"/>
+          <p:cNvPr id="19" name="TextBox 18"/>
           <p:cNvSpPr txBox="1"/>
           <p:nvPr/>
         </p:nvSpPr>
         <p:spPr>
           <a:xfrm>
-            <a:off x="1177200" y="3221999"/>
+            <a:off x="1177200" y="5133600"/>
             <a:ext cx="5810400" cy="370799"/>
           </a:xfrm>
           <a:prstGeom prst="rect">
@@ -5130,14 +5130,14 @@
       </p:sp>
       <p:sp>
         <p:nvSpPr>
-          <p:cNvPr id="14" name="TextBox 13"/>
+          <p:cNvPr id="20" name="TextBox 19"/>
           <p:cNvSpPr txBox="1"/>
           <p:nvPr/>
         </p:nvSpPr>
         <p:spPr>
           <a:xfrm>
-            <a:off x="1159200" y="3650399"/>
-            <a:ext cx="5828400" cy="885600"/>
+            <a:off x="1159200" y="5562000"/>
+            <a:ext cx="5828400" cy="1033199"/>
           </a:xfrm>
           <a:prstGeom prst="rect">
             <a:avLst/>
@@ -5229,14 +5229,14 @@
       </p:sp>
       <p:sp>
         <p:nvSpPr>
-          <p:cNvPr id="15" name="Rectangle 14"/>
+          <p:cNvPr id="21" name="Rectangle 20"/>
           <p:cNvSpPr/>
           <p:nvPr/>
         </p:nvSpPr>
         <p:spPr>
           <a:xfrm>
-            <a:off x="532800" y="4622400"/>
-            <a:ext cx="6490800" cy="1371600"/>
+            <a:off x="532800" y="6696000"/>
+            <a:ext cx="6490800" cy="1684800"/>
           </a:xfrm>
           <a:prstGeom prst="rect">
             <a:avLst/>
@@ -5270,14 +5270,14 @@
       </p:sp>
       <p:sp>
         <p:nvSpPr>
-          <p:cNvPr id="16" name="Rectangle 15"/>
+          <p:cNvPr id="22" name="Rectangle 21"/>
           <p:cNvSpPr/>
           <p:nvPr/>
         </p:nvSpPr>
         <p:spPr>
           <a:xfrm>
-            <a:off x="532800" y="4622400"/>
-            <a:ext cx="572400" cy="1371600"/>
+            <a:off x="532800" y="6696000"/>
+            <a:ext cx="572400" cy="1684800"/>
           </a:xfrm>
           <a:prstGeom prst="rect">
             <a:avLst/>
@@ -5311,13 +5311,13 @@
       </p:sp>
       <p:sp>
         <p:nvSpPr>
-          <p:cNvPr id="17" name="Rectangle 16"/>
+          <p:cNvPr id="23" name="Rectangle 22"/>
           <p:cNvSpPr/>
           <p:nvPr/>
         </p:nvSpPr>
         <p:spPr>
           <a:xfrm>
-            <a:off x="1206000" y="5043600"/>
+            <a:off x="1206000" y="7117200"/>
             <a:ext cx="5752800" cy="7200"/>
           </a:xfrm>
           <a:prstGeom prst="rect">
@@ -5352,13 +5352,13 @@
       </p:sp>
       <p:sp>
         <p:nvSpPr>
-          <p:cNvPr id="18" name="TextBox 17"/>
+          <p:cNvPr id="24" name="TextBox 23"/>
           <p:cNvSpPr txBox="1"/>
           <p:nvPr/>
         </p:nvSpPr>
         <p:spPr>
           <a:xfrm>
-            <a:off x="532800" y="4689000"/>
+            <a:off x="532800" y="6762600"/>
             <a:ext cx="572400" cy="288000"/>
           </a:xfrm>
           <a:prstGeom prst="rect">
@@ -5394,13 +5394,13 @@
       </p:sp>
       <p:sp>
         <p:nvSpPr>
-          <p:cNvPr id="19" name="TextBox 18"/>
+          <p:cNvPr id="25" name="TextBox 24"/>
           <p:cNvSpPr txBox="1"/>
           <p:nvPr/>
         </p:nvSpPr>
         <p:spPr>
           <a:xfrm>
-            <a:off x="1177200" y="4658400"/>
+            <a:off x="1177200" y="6732000"/>
             <a:ext cx="5810400" cy="370799"/>
           </a:xfrm>
           <a:prstGeom prst="rect">
@@ -5436,14 +5436,14 @@
       </p:sp>
       <p:sp>
         <p:nvSpPr>
-          <p:cNvPr id="20" name="TextBox 19"/>
+          <p:cNvPr id="26" name="TextBox 25"/>
           <p:cNvSpPr txBox="1"/>
           <p:nvPr/>
         </p:nvSpPr>
         <p:spPr>
           <a:xfrm>
-            <a:off x="1159200" y="5086800"/>
-            <a:ext cx="5828400" cy="885600"/>
+            <a:off x="1159200" y="7160400"/>
+            <a:ext cx="5828400" cy="1184399"/>
           </a:xfrm>
           <a:prstGeom prst="rect">
             <a:avLst/>
@@ -5535,7 +5535,7 @@
       </p:sp>
       <p:sp>
         <p:nvSpPr>
-          <p:cNvPr id="21" name="Rectangle 20"/>
+          <p:cNvPr id="27" name="Rectangle 26"/>
           <p:cNvSpPr/>
           <p:nvPr/>
         </p:nvSpPr>
@@ -5578,7 +5578,7 @@
       </p:sp>
       <p:sp>
         <p:nvSpPr>
-          <p:cNvPr id="22" name="Rectangle 21"/>
+          <p:cNvPr id="28" name="Rectangle 27"/>
           <p:cNvSpPr/>
           <p:nvPr/>
         </p:nvSpPr>
@@ -5619,7 +5619,7 @@
       </p:sp>
       <p:sp>
         <p:nvSpPr>
-          <p:cNvPr id="23" name="TextBox 22"/>
+          <p:cNvPr id="29" name="TextBox 28"/>
           <p:cNvSpPr txBox="1"/>
           <p:nvPr/>
         </p:nvSpPr>
@@ -5737,7 +5737,7 @@
       </p:sp>
       <p:sp>
         <p:nvSpPr>
-          <p:cNvPr id="24" name="TextBox 23"/>
+          <p:cNvPr id="30" name="TextBox 29"/>
           <p:cNvSpPr txBox="1"/>
           <p:nvPr/>
         </p:nvSpPr>

--- a/assets/memos/B8-memo.pptx
+++ b/assets/memos/B8-memo.pptx
@@ -3097,9 +3097,35 @@
         <p:nvPr/>
       </p:nvGrpSpPr>
       <p:grpSpPr/>
-      <p:sp>
-        <p:nvSpPr>
-          <p:cNvPr id="2" name="TextBox 1"/>
+      <p:pic>
+        <p:nvPicPr>
+          <p:cNvPr id="2" name="Picture 1" descr="bg-p1.png"/>
+          <p:cNvPicPr>
+            <a:picLocks noChangeAspect="1"/>
+          </p:cNvPicPr>
+          <p:nvPr/>
+        </p:nvPicPr>
+        <p:blipFill>
+          <a:blip r:embed="rId2">
+            <a:alphaModFix amt="80000"/>
+          </a:blip>
+          <a:stretch>
+            <a:fillRect/>
+          </a:stretch>
+        </p:blipFill>
+        <p:spPr>
+          <a:xfrm>
+            <a:off x="0" y="0"/>
+            <a:ext cx="7556399" cy="10692000"/>
+          </a:xfrm>
+          <a:prstGeom prst="rect">
+            <a:avLst/>
+          </a:prstGeom>
+        </p:spPr>
+      </p:pic>
+      <p:sp>
+        <p:nvSpPr>
+          <p:cNvPr id="3" name="TextBox 2"/>
           <p:cNvSpPr txBox="1"/>
           <p:nvPr/>
         </p:nvSpPr>
@@ -3160,7 +3186,7 @@
       </p:sp>
       <p:sp>
         <p:nvSpPr>
-          <p:cNvPr id="3" name="Rectangle 2"/>
+          <p:cNvPr id="4" name="Rectangle 3"/>
           <p:cNvSpPr/>
           <p:nvPr/>
         </p:nvSpPr>
@@ -3201,7 +3227,7 @@
       </p:sp>
       <p:sp>
         <p:nvSpPr>
-          <p:cNvPr id="4" name="Rectangle 3"/>
+          <p:cNvPr id="5" name="Rectangle 4"/>
           <p:cNvSpPr/>
           <p:nvPr/>
         </p:nvSpPr>
@@ -3242,7 +3268,7 @@
       </p:sp>
       <p:sp>
         <p:nvSpPr>
-          <p:cNvPr id="5" name="Rectangle 4"/>
+          <p:cNvPr id="6" name="Rectangle 5"/>
           <p:cNvSpPr/>
           <p:nvPr/>
         </p:nvSpPr>
@@ -3283,7 +3309,7 @@
       </p:sp>
       <p:sp>
         <p:nvSpPr>
-          <p:cNvPr id="6" name="TextBox 5"/>
+          <p:cNvPr id="7" name="TextBox 6"/>
           <p:cNvSpPr txBox="1"/>
           <p:nvPr/>
         </p:nvSpPr>
@@ -3325,7 +3351,7 @@
       </p:sp>
       <p:sp>
         <p:nvSpPr>
-          <p:cNvPr id="7" name="TextBox 6"/>
+          <p:cNvPr id="8" name="TextBox 7"/>
           <p:cNvSpPr txBox="1"/>
           <p:nvPr/>
         </p:nvSpPr>
@@ -3367,7 +3393,7 @@
       </p:sp>
       <p:sp>
         <p:nvSpPr>
-          <p:cNvPr id="8" name="TextBox 7"/>
+          <p:cNvPr id="9" name="TextBox 8"/>
           <p:cNvSpPr txBox="1"/>
           <p:nvPr/>
         </p:nvSpPr>
@@ -3466,7 +3492,7 @@
       </p:sp>
       <p:sp>
         <p:nvSpPr>
-          <p:cNvPr id="9" name="Rectangle 8"/>
+          <p:cNvPr id="10" name="Rectangle 9"/>
           <p:cNvSpPr/>
           <p:nvPr/>
         </p:nvSpPr>
@@ -3507,7 +3533,7 @@
       </p:sp>
       <p:sp>
         <p:nvSpPr>
-          <p:cNvPr id="10" name="Rectangle 9"/>
+          <p:cNvPr id="11" name="Rectangle 10"/>
           <p:cNvSpPr/>
           <p:nvPr/>
         </p:nvSpPr>
@@ -3548,7 +3574,7 @@
       </p:sp>
       <p:sp>
         <p:nvSpPr>
-          <p:cNvPr id="11" name="Rectangle 10"/>
+          <p:cNvPr id="12" name="Rectangle 11"/>
           <p:cNvSpPr/>
           <p:nvPr/>
         </p:nvSpPr>
@@ -3589,7 +3615,7 @@
       </p:sp>
       <p:sp>
         <p:nvSpPr>
-          <p:cNvPr id="12" name="TextBox 11"/>
+          <p:cNvPr id="13" name="TextBox 12"/>
           <p:cNvSpPr txBox="1"/>
           <p:nvPr/>
         </p:nvSpPr>
@@ -3631,7 +3657,7 @@
       </p:sp>
       <p:sp>
         <p:nvSpPr>
-          <p:cNvPr id="13" name="TextBox 12"/>
+          <p:cNvPr id="14" name="TextBox 13"/>
           <p:cNvSpPr txBox="1"/>
           <p:nvPr/>
         </p:nvSpPr>
@@ -3673,7 +3699,7 @@
       </p:sp>
       <p:sp>
         <p:nvSpPr>
-          <p:cNvPr id="14" name="TextBox 13"/>
+          <p:cNvPr id="15" name="TextBox 14"/>
           <p:cNvSpPr txBox="1"/>
           <p:nvPr/>
         </p:nvSpPr>
@@ -3772,7 +3798,7 @@
       </p:sp>
       <p:sp>
         <p:nvSpPr>
-          <p:cNvPr id="15" name="Rectangle 14"/>
+          <p:cNvPr id="16" name="Rectangle 15"/>
           <p:cNvSpPr/>
           <p:nvPr/>
         </p:nvSpPr>
@@ -3813,7 +3839,7 @@
       </p:sp>
       <p:sp>
         <p:nvSpPr>
-          <p:cNvPr id="16" name="Rectangle 15"/>
+          <p:cNvPr id="17" name="Rectangle 16"/>
           <p:cNvSpPr/>
           <p:nvPr/>
         </p:nvSpPr>
@@ -3854,7 +3880,7 @@
       </p:sp>
       <p:sp>
         <p:nvSpPr>
-          <p:cNvPr id="17" name="Rectangle 16"/>
+          <p:cNvPr id="18" name="Rectangle 17"/>
           <p:cNvSpPr/>
           <p:nvPr/>
         </p:nvSpPr>
@@ -3895,7 +3921,7 @@
       </p:sp>
       <p:sp>
         <p:nvSpPr>
-          <p:cNvPr id="18" name="TextBox 17"/>
+          <p:cNvPr id="19" name="TextBox 18"/>
           <p:cNvSpPr txBox="1"/>
           <p:nvPr/>
         </p:nvSpPr>
@@ -3937,7 +3963,7 @@
       </p:sp>
       <p:sp>
         <p:nvSpPr>
-          <p:cNvPr id="19" name="TextBox 18"/>
+          <p:cNvPr id="20" name="TextBox 19"/>
           <p:cNvSpPr txBox="1"/>
           <p:nvPr/>
         </p:nvSpPr>
@@ -3979,7 +4005,7 @@
       </p:sp>
       <p:sp>
         <p:nvSpPr>
-          <p:cNvPr id="20" name="TextBox 19"/>
+          <p:cNvPr id="21" name="TextBox 20"/>
           <p:cNvSpPr txBox="1"/>
           <p:nvPr/>
         </p:nvSpPr>
@@ -4078,7 +4104,7 @@
       </p:sp>
       <p:sp>
         <p:nvSpPr>
-          <p:cNvPr id="21" name="Rectangle 20"/>
+          <p:cNvPr id="22" name="Rectangle 21"/>
           <p:cNvSpPr/>
           <p:nvPr/>
         </p:nvSpPr>
@@ -4121,7 +4147,7 @@
       </p:sp>
       <p:sp>
         <p:nvSpPr>
-          <p:cNvPr id="22" name="TextBox 21"/>
+          <p:cNvPr id="23" name="TextBox 22"/>
           <p:cNvSpPr txBox="1"/>
           <p:nvPr/>
         </p:nvSpPr>
@@ -4182,7 +4208,7 @@
       </p:sp>
       <p:sp>
         <p:nvSpPr>
-          <p:cNvPr id="23" name="TextBox 22"/>
+          <p:cNvPr id="24" name="TextBox 23"/>
           <p:cNvSpPr txBox="1"/>
           <p:nvPr/>
         </p:nvSpPr>
@@ -4248,9 +4274,35 @@
         <p:nvPr/>
       </p:nvGrpSpPr>
       <p:grpSpPr/>
-      <p:sp>
-        <p:nvSpPr>
-          <p:cNvPr id="2" name="TextBox 1"/>
+      <p:pic>
+        <p:nvPicPr>
+          <p:cNvPr id="2" name="Picture 1" descr="bg-p2.png"/>
+          <p:cNvPicPr>
+            <a:picLocks noChangeAspect="1"/>
+          </p:cNvPicPr>
+          <p:nvPr/>
+        </p:nvPicPr>
+        <p:blipFill>
+          <a:blip r:embed="rId2">
+            <a:alphaModFix amt="80000"/>
+          </a:blip>
+          <a:stretch>
+            <a:fillRect/>
+          </a:stretch>
+        </p:blipFill>
+        <p:spPr>
+          <a:xfrm>
+            <a:off x="0" y="0"/>
+            <a:ext cx="7556399" cy="10692000"/>
+          </a:xfrm>
+          <a:prstGeom prst="rect">
+            <a:avLst/>
+          </a:prstGeom>
+        </p:spPr>
+      </p:pic>
+      <p:sp>
+        <p:nvSpPr>
+          <p:cNvPr id="3" name="TextBox 2"/>
           <p:cNvSpPr txBox="1"/>
           <p:nvPr/>
         </p:nvSpPr>
@@ -4311,7 +4363,7 @@
       </p:sp>
       <p:sp>
         <p:nvSpPr>
-          <p:cNvPr id="3" name="Rectangle 2"/>
+          <p:cNvPr id="4" name="Rectangle 3"/>
           <p:cNvSpPr/>
           <p:nvPr/>
         </p:nvSpPr>
@@ -4352,7 +4404,7 @@
       </p:sp>
       <p:sp>
         <p:nvSpPr>
-          <p:cNvPr id="4" name="Rectangle 3"/>
+          <p:cNvPr id="5" name="Rectangle 4"/>
           <p:cNvSpPr/>
           <p:nvPr/>
         </p:nvSpPr>
@@ -4393,7 +4445,7 @@
       </p:sp>
       <p:sp>
         <p:nvSpPr>
-          <p:cNvPr id="5" name="Rectangle 4"/>
+          <p:cNvPr id="6" name="Rectangle 5"/>
           <p:cNvSpPr/>
           <p:nvPr/>
         </p:nvSpPr>
@@ -4434,7 +4486,7 @@
       </p:sp>
       <p:sp>
         <p:nvSpPr>
-          <p:cNvPr id="6" name="TextBox 5"/>
+          <p:cNvPr id="7" name="TextBox 6"/>
           <p:cNvSpPr txBox="1"/>
           <p:nvPr/>
         </p:nvSpPr>
@@ -4476,7 +4528,7 @@
       </p:sp>
       <p:sp>
         <p:nvSpPr>
-          <p:cNvPr id="7" name="TextBox 6"/>
+          <p:cNvPr id="8" name="TextBox 7"/>
           <p:cNvSpPr txBox="1"/>
           <p:nvPr/>
         </p:nvSpPr>
@@ -4518,7 +4570,7 @@
       </p:sp>
       <p:sp>
         <p:nvSpPr>
-          <p:cNvPr id="8" name="TextBox 7"/>
+          <p:cNvPr id="9" name="TextBox 8"/>
           <p:cNvSpPr txBox="1"/>
           <p:nvPr/>
         </p:nvSpPr>
@@ -4617,7 +4669,7 @@
       </p:sp>
       <p:sp>
         <p:nvSpPr>
-          <p:cNvPr id="9" name="Rectangle 8"/>
+          <p:cNvPr id="10" name="Rectangle 9"/>
           <p:cNvSpPr/>
           <p:nvPr/>
         </p:nvSpPr>
@@ -4658,7 +4710,7 @@
       </p:sp>
       <p:sp>
         <p:nvSpPr>
-          <p:cNvPr id="10" name="Rectangle 9"/>
+          <p:cNvPr id="11" name="Rectangle 10"/>
           <p:cNvSpPr/>
           <p:nvPr/>
         </p:nvSpPr>
@@ -4699,7 +4751,7 @@
       </p:sp>
       <p:sp>
         <p:nvSpPr>
-          <p:cNvPr id="11" name="Rectangle 10"/>
+          <p:cNvPr id="12" name="Rectangle 11"/>
           <p:cNvSpPr/>
           <p:nvPr/>
         </p:nvSpPr>
@@ -4740,7 +4792,7 @@
       </p:sp>
       <p:sp>
         <p:nvSpPr>
-          <p:cNvPr id="12" name="TextBox 11"/>
+          <p:cNvPr id="13" name="TextBox 12"/>
           <p:cNvSpPr txBox="1"/>
           <p:nvPr/>
         </p:nvSpPr>
@@ -4782,7 +4834,7 @@
       </p:sp>
       <p:sp>
         <p:nvSpPr>
-          <p:cNvPr id="13" name="TextBox 12"/>
+          <p:cNvPr id="14" name="TextBox 13"/>
           <p:cNvSpPr txBox="1"/>
           <p:nvPr/>
         </p:nvSpPr>
@@ -4824,7 +4876,7 @@
       </p:sp>
       <p:sp>
         <p:nvSpPr>
-          <p:cNvPr id="14" name="TextBox 13"/>
+          <p:cNvPr id="15" name="TextBox 14"/>
           <p:cNvSpPr txBox="1"/>
           <p:nvPr/>
         </p:nvSpPr>
@@ -4923,7 +4975,7 @@
       </p:sp>
       <p:sp>
         <p:nvSpPr>
-          <p:cNvPr id="15" name="Rectangle 14"/>
+          <p:cNvPr id="16" name="Rectangle 15"/>
           <p:cNvSpPr/>
           <p:nvPr/>
         </p:nvSpPr>
@@ -4964,7 +5016,7 @@
       </p:sp>
       <p:sp>
         <p:nvSpPr>
-          <p:cNvPr id="16" name="Rectangle 15"/>
+          <p:cNvPr id="17" name="Rectangle 16"/>
           <p:cNvSpPr/>
           <p:nvPr/>
         </p:nvSpPr>
@@ -5005,7 +5057,7 @@
       </p:sp>
       <p:sp>
         <p:nvSpPr>
-          <p:cNvPr id="17" name="Rectangle 16"/>
+          <p:cNvPr id="18" name="Rectangle 17"/>
           <p:cNvSpPr/>
           <p:nvPr/>
         </p:nvSpPr>
@@ -5046,7 +5098,7 @@
       </p:sp>
       <p:sp>
         <p:nvSpPr>
-          <p:cNvPr id="18" name="TextBox 17"/>
+          <p:cNvPr id="19" name="TextBox 18"/>
           <p:cNvSpPr txBox="1"/>
           <p:nvPr/>
         </p:nvSpPr>
@@ -5088,7 +5140,7 @@
       </p:sp>
       <p:sp>
         <p:nvSpPr>
-          <p:cNvPr id="19" name="TextBox 18"/>
+          <p:cNvPr id="20" name="TextBox 19"/>
           <p:cNvSpPr txBox="1"/>
           <p:nvPr/>
         </p:nvSpPr>
@@ -5130,7 +5182,7 @@
       </p:sp>
       <p:sp>
         <p:nvSpPr>
-          <p:cNvPr id="20" name="TextBox 19"/>
+          <p:cNvPr id="21" name="TextBox 20"/>
           <p:cNvSpPr txBox="1"/>
           <p:nvPr/>
         </p:nvSpPr>
@@ -5229,7 +5281,7 @@
       </p:sp>
       <p:sp>
         <p:nvSpPr>
-          <p:cNvPr id="21" name="Rectangle 20"/>
+          <p:cNvPr id="22" name="Rectangle 21"/>
           <p:cNvSpPr/>
           <p:nvPr/>
         </p:nvSpPr>
@@ -5270,7 +5322,7 @@
       </p:sp>
       <p:sp>
         <p:nvSpPr>
-          <p:cNvPr id="22" name="Rectangle 21"/>
+          <p:cNvPr id="23" name="Rectangle 22"/>
           <p:cNvSpPr/>
           <p:nvPr/>
         </p:nvSpPr>
@@ -5311,7 +5363,7 @@
       </p:sp>
       <p:sp>
         <p:nvSpPr>
-          <p:cNvPr id="23" name="Rectangle 22"/>
+          <p:cNvPr id="24" name="Rectangle 23"/>
           <p:cNvSpPr/>
           <p:nvPr/>
         </p:nvSpPr>
@@ -5352,7 +5404,7 @@
       </p:sp>
       <p:sp>
         <p:nvSpPr>
-          <p:cNvPr id="24" name="TextBox 23"/>
+          <p:cNvPr id="25" name="TextBox 24"/>
           <p:cNvSpPr txBox="1"/>
           <p:nvPr/>
         </p:nvSpPr>
@@ -5394,7 +5446,7 @@
       </p:sp>
       <p:sp>
         <p:nvSpPr>
-          <p:cNvPr id="25" name="TextBox 24"/>
+          <p:cNvPr id="26" name="TextBox 25"/>
           <p:cNvSpPr txBox="1"/>
           <p:nvPr/>
         </p:nvSpPr>
@@ -5436,7 +5488,7 @@
       </p:sp>
       <p:sp>
         <p:nvSpPr>
-          <p:cNvPr id="26" name="TextBox 25"/>
+          <p:cNvPr id="27" name="TextBox 26"/>
           <p:cNvSpPr txBox="1"/>
           <p:nvPr/>
         </p:nvSpPr>
@@ -5535,7 +5587,7 @@
       </p:sp>
       <p:sp>
         <p:nvSpPr>
-          <p:cNvPr id="27" name="Rectangle 26"/>
+          <p:cNvPr id="28" name="Rectangle 27"/>
           <p:cNvSpPr/>
           <p:nvPr/>
         </p:nvSpPr>
@@ -5578,7 +5630,7 @@
       </p:sp>
       <p:sp>
         <p:nvSpPr>
-          <p:cNvPr id="28" name="Rectangle 27"/>
+          <p:cNvPr id="29" name="Rectangle 28"/>
           <p:cNvSpPr/>
           <p:nvPr/>
         </p:nvSpPr>
@@ -5619,7 +5671,7 @@
       </p:sp>
       <p:sp>
         <p:nvSpPr>
-          <p:cNvPr id="29" name="TextBox 28"/>
+          <p:cNvPr id="30" name="TextBox 29"/>
           <p:cNvSpPr txBox="1"/>
           <p:nvPr/>
         </p:nvSpPr>
@@ -5737,7 +5789,7 @@
       </p:sp>
       <p:sp>
         <p:nvSpPr>
-          <p:cNvPr id="30" name="TextBox 29"/>
+          <p:cNvPr id="31" name="TextBox 30"/>
           <p:cNvSpPr txBox="1"/>
           <p:nvPr/>
         </p:nvSpPr>

--- a/assets/memos/B8-memo.pptx
+++ b/assets/memos/B8-memo.pptx
@@ -3084,9 +3084,12 @@
   <p:cSld>
     <p:bg>
       <p:bgPr>
-        <a:solidFill>
-          <a:srgbClr val="FFFFFF"/>
-        </a:solidFill>
+        <a:blipFill>
+          <a:blip r:embed="rId2"/>
+          <a:stretch>
+            <a:fillRect/>
+          </a:stretch>
+        </a:blipFill>
         <a:effectLst/>
       </p:bgPr>
     </p:bg>
@@ -3097,35 +3100,9 @@
         <p:nvPr/>
       </p:nvGrpSpPr>
       <p:grpSpPr/>
-      <p:pic>
-        <p:nvPicPr>
-          <p:cNvPr id="2" name="Picture 1" descr="bg-p1.png"/>
-          <p:cNvPicPr>
-            <a:picLocks noChangeAspect="1"/>
-          </p:cNvPicPr>
-          <p:nvPr/>
-        </p:nvPicPr>
-        <p:blipFill>
-          <a:blip r:embed="rId2">
-            <a:alphaModFix amt="80000"/>
-          </a:blip>
-          <a:stretch>
-            <a:fillRect/>
-          </a:stretch>
-        </p:blipFill>
-        <p:spPr>
-          <a:xfrm>
-            <a:off x="0" y="0"/>
-            <a:ext cx="7556399" cy="10692000"/>
-          </a:xfrm>
-          <a:prstGeom prst="rect">
-            <a:avLst/>
-          </a:prstGeom>
-        </p:spPr>
-      </p:pic>
-      <p:sp>
-        <p:nvSpPr>
-          <p:cNvPr id="3" name="TextBox 2"/>
+      <p:sp>
+        <p:nvSpPr>
+          <p:cNvPr id="2" name="TextBox 1"/>
           <p:cNvSpPr txBox="1"/>
           <p:nvPr/>
         </p:nvSpPr>
@@ -3186,7 +3163,7 @@
       </p:sp>
       <p:sp>
         <p:nvSpPr>
-          <p:cNvPr id="4" name="Rectangle 3"/>
+          <p:cNvPr id="3" name="Rectangle 2"/>
           <p:cNvSpPr/>
           <p:nvPr/>
         </p:nvSpPr>
@@ -3227,7 +3204,7 @@
       </p:sp>
       <p:sp>
         <p:nvSpPr>
-          <p:cNvPr id="5" name="Rectangle 4"/>
+          <p:cNvPr id="4" name="Rectangle 3"/>
           <p:cNvSpPr/>
           <p:nvPr/>
         </p:nvSpPr>
@@ -3268,7 +3245,7 @@
       </p:sp>
       <p:sp>
         <p:nvSpPr>
-          <p:cNvPr id="6" name="Rectangle 5"/>
+          <p:cNvPr id="5" name="Rectangle 4"/>
           <p:cNvSpPr/>
           <p:nvPr/>
         </p:nvSpPr>
@@ -3309,7 +3286,7 @@
       </p:sp>
       <p:sp>
         <p:nvSpPr>
-          <p:cNvPr id="7" name="TextBox 6"/>
+          <p:cNvPr id="6" name="TextBox 5"/>
           <p:cNvSpPr txBox="1"/>
           <p:nvPr/>
         </p:nvSpPr>
@@ -3351,7 +3328,7 @@
       </p:sp>
       <p:sp>
         <p:nvSpPr>
-          <p:cNvPr id="8" name="TextBox 7"/>
+          <p:cNvPr id="7" name="TextBox 6"/>
           <p:cNvSpPr txBox="1"/>
           <p:nvPr/>
         </p:nvSpPr>
@@ -3393,7 +3370,7 @@
       </p:sp>
       <p:sp>
         <p:nvSpPr>
-          <p:cNvPr id="9" name="TextBox 8"/>
+          <p:cNvPr id="8" name="TextBox 7"/>
           <p:cNvSpPr txBox="1"/>
           <p:nvPr/>
         </p:nvSpPr>
@@ -3492,7 +3469,7 @@
       </p:sp>
       <p:sp>
         <p:nvSpPr>
-          <p:cNvPr id="10" name="Rectangle 9"/>
+          <p:cNvPr id="9" name="Rectangle 8"/>
           <p:cNvSpPr/>
           <p:nvPr/>
         </p:nvSpPr>
@@ -3533,7 +3510,7 @@
       </p:sp>
       <p:sp>
         <p:nvSpPr>
-          <p:cNvPr id="11" name="Rectangle 10"/>
+          <p:cNvPr id="10" name="Rectangle 9"/>
           <p:cNvSpPr/>
           <p:nvPr/>
         </p:nvSpPr>
@@ -3574,7 +3551,7 @@
       </p:sp>
       <p:sp>
         <p:nvSpPr>
-          <p:cNvPr id="12" name="Rectangle 11"/>
+          <p:cNvPr id="11" name="Rectangle 10"/>
           <p:cNvSpPr/>
           <p:nvPr/>
         </p:nvSpPr>
@@ -3615,7 +3592,7 @@
       </p:sp>
       <p:sp>
         <p:nvSpPr>
-          <p:cNvPr id="13" name="TextBox 12"/>
+          <p:cNvPr id="12" name="TextBox 11"/>
           <p:cNvSpPr txBox="1"/>
           <p:nvPr/>
         </p:nvSpPr>
@@ -3657,7 +3634,7 @@
       </p:sp>
       <p:sp>
         <p:nvSpPr>
-          <p:cNvPr id="14" name="TextBox 13"/>
+          <p:cNvPr id="13" name="TextBox 12"/>
           <p:cNvSpPr txBox="1"/>
           <p:nvPr/>
         </p:nvSpPr>
@@ -3699,7 +3676,7 @@
       </p:sp>
       <p:sp>
         <p:nvSpPr>
-          <p:cNvPr id="15" name="TextBox 14"/>
+          <p:cNvPr id="14" name="TextBox 13"/>
           <p:cNvSpPr txBox="1"/>
           <p:nvPr/>
         </p:nvSpPr>
@@ -3798,7 +3775,7 @@
       </p:sp>
       <p:sp>
         <p:nvSpPr>
-          <p:cNvPr id="16" name="Rectangle 15"/>
+          <p:cNvPr id="15" name="Rectangle 14"/>
           <p:cNvSpPr/>
           <p:nvPr/>
         </p:nvSpPr>
@@ -3839,7 +3816,7 @@
       </p:sp>
       <p:sp>
         <p:nvSpPr>
-          <p:cNvPr id="17" name="Rectangle 16"/>
+          <p:cNvPr id="16" name="Rectangle 15"/>
           <p:cNvSpPr/>
           <p:nvPr/>
         </p:nvSpPr>
@@ -3880,7 +3857,7 @@
       </p:sp>
       <p:sp>
         <p:nvSpPr>
-          <p:cNvPr id="18" name="Rectangle 17"/>
+          <p:cNvPr id="17" name="Rectangle 16"/>
           <p:cNvSpPr/>
           <p:nvPr/>
         </p:nvSpPr>
@@ -3921,7 +3898,7 @@
       </p:sp>
       <p:sp>
         <p:nvSpPr>
-          <p:cNvPr id="19" name="TextBox 18"/>
+          <p:cNvPr id="18" name="TextBox 17"/>
           <p:cNvSpPr txBox="1"/>
           <p:nvPr/>
         </p:nvSpPr>
@@ -3963,7 +3940,7 @@
       </p:sp>
       <p:sp>
         <p:nvSpPr>
-          <p:cNvPr id="20" name="TextBox 19"/>
+          <p:cNvPr id="19" name="TextBox 18"/>
           <p:cNvSpPr txBox="1"/>
           <p:nvPr/>
         </p:nvSpPr>
@@ -4005,7 +3982,7 @@
       </p:sp>
       <p:sp>
         <p:nvSpPr>
-          <p:cNvPr id="21" name="TextBox 20"/>
+          <p:cNvPr id="20" name="TextBox 19"/>
           <p:cNvSpPr txBox="1"/>
           <p:nvPr/>
         </p:nvSpPr>
@@ -4104,7 +4081,7 @@
       </p:sp>
       <p:sp>
         <p:nvSpPr>
-          <p:cNvPr id="22" name="Rectangle 21"/>
+          <p:cNvPr id="21" name="Rectangle 20"/>
           <p:cNvSpPr/>
           <p:nvPr/>
         </p:nvSpPr>
@@ -4147,7 +4124,7 @@
       </p:sp>
       <p:sp>
         <p:nvSpPr>
-          <p:cNvPr id="23" name="TextBox 22"/>
+          <p:cNvPr id="22" name="TextBox 21"/>
           <p:cNvSpPr txBox="1"/>
           <p:nvPr/>
         </p:nvSpPr>
@@ -4208,7 +4185,7 @@
       </p:sp>
       <p:sp>
         <p:nvSpPr>
-          <p:cNvPr id="24" name="TextBox 23"/>
+          <p:cNvPr id="23" name="TextBox 22"/>
           <p:cNvSpPr txBox="1"/>
           <p:nvPr/>
         </p:nvSpPr>
@@ -4261,9 +4238,12 @@
   <p:cSld>
     <p:bg>
       <p:bgPr>
-        <a:solidFill>
-          <a:srgbClr val="FFFFFF"/>
-        </a:solidFill>
+        <a:blipFill>
+          <a:blip r:embed="rId2"/>
+          <a:stretch>
+            <a:fillRect/>
+          </a:stretch>
+        </a:blipFill>
         <a:effectLst/>
       </p:bgPr>
     </p:bg>
@@ -4274,35 +4254,9 @@
         <p:nvPr/>
       </p:nvGrpSpPr>
       <p:grpSpPr/>
-      <p:pic>
-        <p:nvPicPr>
-          <p:cNvPr id="2" name="Picture 1" descr="bg-p2.png"/>
-          <p:cNvPicPr>
-            <a:picLocks noChangeAspect="1"/>
-          </p:cNvPicPr>
-          <p:nvPr/>
-        </p:nvPicPr>
-        <p:blipFill>
-          <a:blip r:embed="rId2">
-            <a:alphaModFix amt="80000"/>
-          </a:blip>
-          <a:stretch>
-            <a:fillRect/>
-          </a:stretch>
-        </p:blipFill>
-        <p:spPr>
-          <a:xfrm>
-            <a:off x="0" y="0"/>
-            <a:ext cx="7556399" cy="10692000"/>
-          </a:xfrm>
-          <a:prstGeom prst="rect">
-            <a:avLst/>
-          </a:prstGeom>
-        </p:spPr>
-      </p:pic>
-      <p:sp>
-        <p:nvSpPr>
-          <p:cNvPr id="3" name="TextBox 2"/>
+      <p:sp>
+        <p:nvSpPr>
+          <p:cNvPr id="2" name="TextBox 1"/>
           <p:cNvSpPr txBox="1"/>
           <p:nvPr/>
         </p:nvSpPr>
@@ -4363,7 +4317,7 @@
       </p:sp>
       <p:sp>
         <p:nvSpPr>
-          <p:cNvPr id="4" name="Rectangle 3"/>
+          <p:cNvPr id="3" name="Rectangle 2"/>
           <p:cNvSpPr/>
           <p:nvPr/>
         </p:nvSpPr>
@@ -4404,7 +4358,7 @@
       </p:sp>
       <p:sp>
         <p:nvSpPr>
-          <p:cNvPr id="5" name="Rectangle 4"/>
+          <p:cNvPr id="4" name="Rectangle 3"/>
           <p:cNvSpPr/>
           <p:nvPr/>
         </p:nvSpPr>
@@ -4445,7 +4399,7 @@
       </p:sp>
       <p:sp>
         <p:nvSpPr>
-          <p:cNvPr id="6" name="Rectangle 5"/>
+          <p:cNvPr id="5" name="Rectangle 4"/>
           <p:cNvSpPr/>
           <p:nvPr/>
         </p:nvSpPr>
@@ -4486,7 +4440,7 @@
       </p:sp>
       <p:sp>
         <p:nvSpPr>
-          <p:cNvPr id="7" name="TextBox 6"/>
+          <p:cNvPr id="6" name="TextBox 5"/>
           <p:cNvSpPr txBox="1"/>
           <p:nvPr/>
         </p:nvSpPr>
@@ -4528,7 +4482,7 @@
       </p:sp>
       <p:sp>
         <p:nvSpPr>
-          <p:cNvPr id="8" name="TextBox 7"/>
+          <p:cNvPr id="7" name="TextBox 6"/>
           <p:cNvSpPr txBox="1"/>
           <p:nvPr/>
         </p:nvSpPr>
@@ -4570,7 +4524,7 @@
       </p:sp>
       <p:sp>
         <p:nvSpPr>
-          <p:cNvPr id="9" name="TextBox 8"/>
+          <p:cNvPr id="8" name="TextBox 7"/>
           <p:cNvSpPr txBox="1"/>
           <p:nvPr/>
         </p:nvSpPr>
@@ -4669,7 +4623,7 @@
       </p:sp>
       <p:sp>
         <p:nvSpPr>
-          <p:cNvPr id="10" name="Rectangle 9"/>
+          <p:cNvPr id="9" name="Rectangle 8"/>
           <p:cNvSpPr/>
           <p:nvPr/>
         </p:nvSpPr>
@@ -4710,7 +4664,7 @@
       </p:sp>
       <p:sp>
         <p:nvSpPr>
-          <p:cNvPr id="11" name="Rectangle 10"/>
+          <p:cNvPr id="10" name="Rectangle 9"/>
           <p:cNvSpPr/>
           <p:nvPr/>
         </p:nvSpPr>
@@ -4751,7 +4705,7 @@
       </p:sp>
       <p:sp>
         <p:nvSpPr>
-          <p:cNvPr id="12" name="Rectangle 11"/>
+          <p:cNvPr id="11" name="Rectangle 10"/>
           <p:cNvSpPr/>
           <p:nvPr/>
         </p:nvSpPr>
@@ -4792,7 +4746,7 @@
       </p:sp>
       <p:sp>
         <p:nvSpPr>
-          <p:cNvPr id="13" name="TextBox 12"/>
+          <p:cNvPr id="12" name="TextBox 11"/>
           <p:cNvSpPr txBox="1"/>
           <p:nvPr/>
         </p:nvSpPr>
@@ -4834,7 +4788,7 @@
       </p:sp>
       <p:sp>
         <p:nvSpPr>
-          <p:cNvPr id="14" name="TextBox 13"/>
+          <p:cNvPr id="13" name="TextBox 12"/>
           <p:cNvSpPr txBox="1"/>
           <p:nvPr/>
         </p:nvSpPr>
@@ -4876,7 +4830,7 @@
       </p:sp>
       <p:sp>
         <p:nvSpPr>
-          <p:cNvPr id="15" name="TextBox 14"/>
+          <p:cNvPr id="14" name="TextBox 13"/>
           <p:cNvSpPr txBox="1"/>
           <p:nvPr/>
         </p:nvSpPr>
@@ -4975,7 +4929,7 @@
       </p:sp>
       <p:sp>
         <p:nvSpPr>
-          <p:cNvPr id="16" name="Rectangle 15"/>
+          <p:cNvPr id="15" name="Rectangle 14"/>
           <p:cNvSpPr/>
           <p:nvPr/>
         </p:nvSpPr>
@@ -5016,7 +4970,7 @@
       </p:sp>
       <p:sp>
         <p:nvSpPr>
-          <p:cNvPr id="17" name="Rectangle 16"/>
+          <p:cNvPr id="16" name="Rectangle 15"/>
           <p:cNvSpPr/>
           <p:nvPr/>
         </p:nvSpPr>
@@ -5057,7 +5011,7 @@
       </p:sp>
       <p:sp>
         <p:nvSpPr>
-          <p:cNvPr id="18" name="Rectangle 17"/>
+          <p:cNvPr id="17" name="Rectangle 16"/>
           <p:cNvSpPr/>
           <p:nvPr/>
         </p:nvSpPr>
@@ -5098,7 +5052,7 @@
       </p:sp>
       <p:sp>
         <p:nvSpPr>
-          <p:cNvPr id="19" name="TextBox 18"/>
+          <p:cNvPr id="18" name="TextBox 17"/>
           <p:cNvSpPr txBox="1"/>
           <p:nvPr/>
         </p:nvSpPr>
@@ -5140,7 +5094,7 @@
       </p:sp>
       <p:sp>
         <p:nvSpPr>
-          <p:cNvPr id="20" name="TextBox 19"/>
+          <p:cNvPr id="19" name="TextBox 18"/>
           <p:cNvSpPr txBox="1"/>
           <p:nvPr/>
         </p:nvSpPr>
@@ -5182,7 +5136,7 @@
       </p:sp>
       <p:sp>
         <p:nvSpPr>
-          <p:cNvPr id="21" name="TextBox 20"/>
+          <p:cNvPr id="20" name="TextBox 19"/>
           <p:cNvSpPr txBox="1"/>
           <p:nvPr/>
         </p:nvSpPr>
@@ -5281,7 +5235,7 @@
       </p:sp>
       <p:sp>
         <p:nvSpPr>
-          <p:cNvPr id="22" name="Rectangle 21"/>
+          <p:cNvPr id="21" name="Rectangle 20"/>
           <p:cNvSpPr/>
           <p:nvPr/>
         </p:nvSpPr>
@@ -5322,7 +5276,7 @@
       </p:sp>
       <p:sp>
         <p:nvSpPr>
-          <p:cNvPr id="23" name="Rectangle 22"/>
+          <p:cNvPr id="22" name="Rectangle 21"/>
           <p:cNvSpPr/>
           <p:nvPr/>
         </p:nvSpPr>
@@ -5363,7 +5317,7 @@
       </p:sp>
       <p:sp>
         <p:nvSpPr>
-          <p:cNvPr id="24" name="Rectangle 23"/>
+          <p:cNvPr id="23" name="Rectangle 22"/>
           <p:cNvSpPr/>
           <p:nvPr/>
         </p:nvSpPr>
@@ -5404,7 +5358,7 @@
       </p:sp>
       <p:sp>
         <p:nvSpPr>
-          <p:cNvPr id="25" name="TextBox 24"/>
+          <p:cNvPr id="24" name="TextBox 23"/>
           <p:cNvSpPr txBox="1"/>
           <p:nvPr/>
         </p:nvSpPr>
@@ -5446,7 +5400,7 @@
       </p:sp>
       <p:sp>
         <p:nvSpPr>
-          <p:cNvPr id="26" name="TextBox 25"/>
+          <p:cNvPr id="25" name="TextBox 24"/>
           <p:cNvSpPr txBox="1"/>
           <p:nvPr/>
         </p:nvSpPr>
@@ -5488,7 +5442,7 @@
       </p:sp>
       <p:sp>
         <p:nvSpPr>
-          <p:cNvPr id="27" name="TextBox 26"/>
+          <p:cNvPr id="26" name="TextBox 25"/>
           <p:cNvSpPr txBox="1"/>
           <p:nvPr/>
         </p:nvSpPr>
@@ -5587,7 +5541,7 @@
       </p:sp>
       <p:sp>
         <p:nvSpPr>
-          <p:cNvPr id="28" name="Rectangle 27"/>
+          <p:cNvPr id="27" name="Rectangle 26"/>
           <p:cNvSpPr/>
           <p:nvPr/>
         </p:nvSpPr>
@@ -5630,7 +5584,7 @@
       </p:sp>
       <p:sp>
         <p:nvSpPr>
-          <p:cNvPr id="29" name="Rectangle 28"/>
+          <p:cNvPr id="28" name="Rectangle 27"/>
           <p:cNvSpPr/>
           <p:nvPr/>
         </p:nvSpPr>
@@ -5671,7 +5625,7 @@
       </p:sp>
       <p:sp>
         <p:nvSpPr>
-          <p:cNvPr id="30" name="TextBox 29"/>
+          <p:cNvPr id="29" name="TextBox 28"/>
           <p:cNvSpPr txBox="1"/>
           <p:nvPr/>
         </p:nvSpPr>
@@ -5789,7 +5743,7 @@
       </p:sp>
       <p:sp>
         <p:nvSpPr>
-          <p:cNvPr id="31" name="TextBox 30"/>
+          <p:cNvPr id="30" name="TextBox 29"/>
           <p:cNvSpPr txBox="1"/>
           <p:nvPr/>
         </p:nvSpPr>

--- a/assets/memos/B8-memo.pptx
+++ b/assets/memos/B8-memo.pptx
@@ -3476,7 +3476,7 @@
         <p:spPr>
           <a:xfrm>
             <a:off x="532800" y="3499199"/>
-            <a:ext cx="6490800" cy="2138400"/>
+            <a:ext cx="6490800" cy="1835999"/>
           </a:xfrm>
           <a:prstGeom prst="rect">
             <a:avLst/>
@@ -3517,7 +3517,7 @@
         <p:spPr>
           <a:xfrm>
             <a:off x="532800" y="3499199"/>
-            <a:ext cx="572400" cy="2138400"/>
+            <a:ext cx="572400" cy="1835999"/>
           </a:xfrm>
           <a:prstGeom prst="rect">
             <a:avLst/>
@@ -3683,7 +3683,7 @@
         <p:spPr>
           <a:xfrm>
             <a:off x="1159200" y="3963599"/>
-            <a:ext cx="5828400" cy="1638000"/>
+            <a:ext cx="5828400" cy="1335599"/>
           </a:xfrm>
           <a:prstGeom prst="rect">
             <a:avLst/>
@@ -3711,7 +3711,7 @@
                 </a:solidFill>
                 <a:latin typeface="Arial"/>
               </a:rPr>
-              <a:t>→ Il existe aujourd'hui des dizaines d'applications pour gérer ses finances. Voici les plus populaires en France, pour tous les profils :</a:t>
+              <a:t>→ Il existe aujourd'hui des dizaines d'applications pour gérer ses finances. Voici les plus populaires</a:t>
             </a:r>
           </a:p>
           <a:p>
@@ -3730,7 +3730,7 @@
                 </a:solidFill>
                 <a:latin typeface="Arial"/>
               </a:rPr>
-              <a:t>→ L'application française de référence. Elle se connecte à vos comptes bancaires et catégorise automatiquement vos dépenses. Idéale pour avoir une vue d'ensemble instantanée.</a:t>
+              <a:t>→ en France, pour tous les profils :</a:t>
             </a:r>
           </a:p>
           <a:p>
@@ -3749,7 +3749,7 @@
                 </a:solidFill>
                 <a:latin typeface="Arial"/>
               </a:rPr>
-              <a:t>→ Très populaire et intuitive, Bankin' agrège tous vos comptes en un seul endroit. Son coach financier virtuel vous alerte sur vos habitudes de dépenses.</a:t>
+              <a:t>→ L'application française de référence. Elle se connecte à vos comptes bancaires et catégorise automatiquement vos dépenses. Idéale pour avoir une vue d'ensemble instantanée.</a:t>
             </a:r>
           </a:p>
           <a:p>
@@ -3768,7 +3768,7 @@
                 </a:solidFill>
                 <a:latin typeface="Arial"/>
               </a:rPr>
-              <a:t>→ Solution complète avec tableaux de bord personnalisables. Parfaite pour ceux qui aiment analyser leurs finances en détail et définir des budgets par catégorie.</a:t>
+              <a:t>→ Très populaire et intuitive, Bankin' agrège tous vos comptes en un seul endroit. Son coach financier virtuel vous alerte sur vos habitudes de dépenses.</a:t>
             </a:r>
           </a:p>
         </p:txBody>
@@ -3781,7 +3781,7 @@
         </p:nvSpPr>
         <p:spPr>
           <a:xfrm>
-            <a:off x="532800" y="5702399"/>
+            <a:off x="532800" y="5399999"/>
             <a:ext cx="6490800" cy="1382400"/>
           </a:xfrm>
           <a:prstGeom prst="rect">
@@ -3822,7 +3822,7 @@
         </p:nvSpPr>
         <p:spPr>
           <a:xfrm>
-            <a:off x="532800" y="5702399"/>
+            <a:off x="532800" y="5399999"/>
             <a:ext cx="572400" cy="1382400"/>
           </a:xfrm>
           <a:prstGeom prst="rect">
@@ -3863,7 +3863,7 @@
         </p:nvSpPr>
         <p:spPr>
           <a:xfrm>
-            <a:off x="1206000" y="6123599"/>
+            <a:off x="1206000" y="5821199"/>
             <a:ext cx="5752800" cy="7200"/>
           </a:xfrm>
           <a:prstGeom prst="rect">
@@ -3904,7 +3904,7 @@
         </p:nvSpPr>
         <p:spPr>
           <a:xfrm>
-            <a:off x="532800" y="5768999"/>
+            <a:off x="532800" y="5466600"/>
             <a:ext cx="572400" cy="288000"/>
           </a:xfrm>
           <a:prstGeom prst="rect">
@@ -3946,7 +3946,7 @@
         </p:nvSpPr>
         <p:spPr>
           <a:xfrm>
-            <a:off x="1177200" y="5738399"/>
+            <a:off x="1177200" y="5435999"/>
             <a:ext cx="5810400" cy="370799"/>
           </a:xfrm>
           <a:prstGeom prst="rect">
@@ -3988,7 +3988,7 @@
         </p:nvSpPr>
         <p:spPr>
           <a:xfrm>
-            <a:off x="1159200" y="6166800"/>
+            <a:off x="1159200" y="5864400"/>
             <a:ext cx="5828400" cy="881999"/>
           </a:xfrm>
           <a:prstGeom prst="rect">
@@ -4559,7 +4559,7 @@
                 </a:solidFill>
                 <a:latin typeface="Arial"/>
               </a:rPr>
-              <a:t>→ Au-delà des applications, quelques méthodes éprouvées permettent de transformer ses habitudes financières en profondeur :</a:t>
+              <a:t>→ Au-delà des applications, quelques méthodes éprouvées permettent de transformer ses habitudes_x000B_financières en profondeur :</a:t>
             </a:r>
           </a:p>
           <a:p>
@@ -5171,7 +5171,7 @@
                 </a:solidFill>
                 <a:latin typeface="Arial"/>
               </a:rPr>
-              <a:t>→ La principale réticence à utiliser ces outils est souvent la question de la sécurité. Voici les éléments essentiels pour faire des choix éclairés et serein :</a:t>
+              <a:t>→ La principale réticence à utiliser ces outils est souvent la question de la sécurité. Voici les éléments_x000B_essentiels pour faire des choix éclairés et serein :</a:t>
             </a:r>
           </a:p>
           <a:p>
